--- a/curso/pptx/S47.pptx
+++ b/curso/pptx/S47.pptx
@@ -6997,7 +6997,7 @@
                 </a:solidFill>
                 <a:latin typeface="Nunito Sans"/>
               </a:rPr>
-              <a:t>Sesión 3: sentirse seguro no es lo mismo que saber</a:t>
+              <a:t>第3课：感觉有把握，和真正知道，不是一回事</a:t>
             </a:r>
           </a:p>
           <a:p>
@@ -7022,7 +7022,7 @@
                 </a:solidFill>
                 <a:latin typeface="Nunito Sans"/>
               </a:rPr>
-              <a:t>Nos pasa a casi todos en algún tema</a:t>
+              <a:t>几乎所有人在某个话题上都会这样</a:t>
             </a:r>
           </a:p>
           <a:p>
@@ -7047,7 +7047,7 @@
                 </a:solidFill>
                 <a:latin typeface="Nunito Sans"/>
               </a:rPr>
-              <a:t>Es más fácil verlo en los demás que en uno mismo</a:t>
+              <a:t>在别人身上比在自己身上更容易看出来</a:t>
             </a:r>
           </a:p>
         </p:txBody>
@@ -7595,7 +7595,7 @@
                 </a:solidFill>
                 <a:latin typeface="Nunito Sans"/>
               </a:rPr>
-              <a:t>Quien sabe poco de algo a menudo </a:t>
+              <a:t>对某件事知道得少的人，常常</a:t>
             </a:r>
             <a:r>
               <a:rPr sz="2800" b="1">
@@ -7604,7 +7604,7 @@
                 </a:solidFill>
                 <a:latin typeface="Nunito Sans"/>
               </a:rPr>
-              <a:t>no ve</a:t>
+              <a:t>看不到</a:t>
             </a:r>
             <a:r>
               <a:rPr sz="2800" b="0">
@@ -7613,7 +7613,7 @@
                 </a:solidFill>
                 <a:latin typeface="Nunito Sans"/>
               </a:rPr>
-              <a:t> sus errores</a:t>
+              <a:t>自己的错误</a:t>
             </a:r>
           </a:p>
           <a:p>
@@ -7638,7 +7638,7 @@
                 </a:solidFill>
                 <a:latin typeface="Nunito Sans"/>
               </a:rPr>
-              <a:t>Los mejores, en cambio, se valoraban un poco por debajo</a:t>
+              <a:t>相反，最好的人对自己的评价还稍微低一点</a:t>
             </a:r>
           </a:p>
           <a:p>
@@ -7663,7 +7663,7 @@
                 </a:solidFill>
                 <a:latin typeface="Nunito Sans"/>
               </a:rPr>
-              <a:t>Ojo:</a:t>
+              <a:t>注意：</a:t>
             </a:r>
             <a:r>
               <a:rPr sz="2800" b="0">
@@ -7672,7 +7672,7 @@
                 </a:solidFill>
                 <a:latin typeface="Nunito Sans"/>
               </a:rPr>
-              <a:t> no dice que quien sabe poco se crea un genio</a:t>
+              <a:t>它并不是说知道得少的人会以为自己是天才</a:t>
             </a:r>
           </a:p>
           <a:p>
@@ -7697,7 +7697,7 @@
                 </a:solidFill>
                 <a:latin typeface="Nunito Sans"/>
               </a:rPr>
-              <a:t>Se discute: parte puede ser un efecto de la estadística</a:t>
+              <a:t>对此还有争论：一部分可能是统计造成的效应</a:t>
             </a:r>
           </a:p>
         </p:txBody>

--- a/curso/pptx/S47.pptx
+++ b/curso/pptx/S47.pptx
@@ -4128,7 +4128,7 @@
                 </a:solidFill>
                 <a:latin typeface="Nunito Sans"/>
               </a:rPr>
-              <a:t>Iker：“明天的考试我会了。我读过一遍，全都明白。”</a:t>
+              <a:t>一个男孩：“明天的考试我会了。我读过一遍，全都明白。”</a:t>
             </a:r>
           </a:p>
         </p:txBody>
@@ -4746,7 +4746,7 @@
                 </a:solidFill>
                 <a:latin typeface="Nunito Sans"/>
               </a:rPr>
-              <a:t>Chen：“这份作业我周日下午做，两个小时。”他总是这么说，而且总是做到夜里。</a:t>
+              <a:t>一个男孩：“这份作业我周日下午做，两个小时。”他总是这么说，而且总是做到夜里。</a:t>
             </a:r>
           </a:p>
         </p:txBody>
@@ -4794,7 +4794,7 @@
                 </a:solidFill>
                 <a:latin typeface="Nunito Sans"/>
               </a:rPr>
-              <a:t>Chen做计划时，就好像一切都会顺顺利利。</a:t>
+              <a:t>这个男孩做计划时，就好像一切都会顺顺利利。</a:t>
             </a:r>
           </a:p>
           <a:p>
@@ -5055,7 +5055,7 @@
                 </a:solidFill>
                 <a:latin typeface="Nunito Sans"/>
               </a:rPr>
-              <a:t>Aitor已经注册当了三年的守门员。他说：“课间的点球，我扑得比班上任何人都多。”他每个星期都在证明这一点。</a:t>
+              <a:t>一个男孩已经注册当了三年的守门员。他说：“课间的点球，我扑得比班上任何人都多。”他每个星期都在证明这一点。</a:t>
             </a:r>
           </a:p>
         </p:txBody>
@@ -6620,7 +6620,7 @@
                 </a:solidFill>
                 <a:latin typeface="Nunito Sans"/>
               </a:rPr>
-              <a:t>Iker：“明天的考试我会了。我读过一遍，全都明白。”</a:t>
+              <a:t>一个男孩：“明天的考试我会了。我读过一遍，全都明白。”</a:t>
             </a:r>
           </a:p>
         </p:txBody>
